--- a/topic12-monads/unit-12a-lectures/talk-1/a-monads.pptx
+++ b/topic12-monads/unit-12a-lectures/talk-1/a-monads.pptx
@@ -9569,7 +9569,14 @@
                 <a:latin typeface="Tahoma" panose="020B0604030504040204" pitchFamily="34" charset="0"/>
                 <a:ea typeface="MS PGothic" panose="020B0600070205080204" pitchFamily="34" charset="-128"/>
               </a:rPr>
-              <a:t>Topic 12.1 – Monads</a:t>
+              <a:t>Topic 12 </a:t>
+            </a:r>
+            <a:r>
+              <a:rPr kumimoji="1" lang="en-US" altLang="en-US" sz="2400" dirty="0">
+                <a:latin typeface="Tahoma" panose="020B0604030504040204" pitchFamily="34" charset="0"/>
+                <a:ea typeface="MS PGothic" panose="020B0600070205080204" pitchFamily="34" charset="-128"/>
+              </a:rPr>
+              <a:t>– Monads</a:t>
             </a:r>
           </a:p>
         </p:txBody>
@@ -18313,41 +18320,6 @@
           </a:p>
         </p:txBody>
       </p:sp>
-      <p:sp>
-        <p:nvSpPr>
-          <p:cNvPr id="6" name="TextBox 5">
-            <a:extLst>
-              <a:ext uri="{FF2B5EF4-FFF2-40B4-BE49-F238E27FC236}">
-                <a16:creationId xmlns:a16="http://schemas.microsoft.com/office/drawing/2014/main" id="{8A52058E-4C39-88DA-272D-0CA3A15E537E}"/>
-              </a:ext>
-            </a:extLst>
-          </p:cNvPr>
-          <p:cNvSpPr txBox="1"/>
-          <p:nvPr/>
-        </p:nvSpPr>
-        <p:spPr>
-          <a:xfrm>
-            <a:off x="325464" y="5315919"/>
-            <a:ext cx="728421" cy="369332"/>
-          </a:xfrm>
-          <a:prstGeom prst="rect">
-            <a:avLst/>
-          </a:prstGeom>
-          <a:noFill/>
-        </p:spPr>
-        <p:txBody>
-          <a:bodyPr wrap="square" rtlCol="0">
-            <a:spAutoFit/>
-          </a:bodyPr>
-          <a:lstStyle/>
-          <a:p>
-            <a:r>
-              <a:rPr lang="en-US" dirty="0"/>
-              <a:t>or</a:t>
-            </a:r>
-          </a:p>
-        </p:txBody>
-      </p:sp>
     </p:spTree>
     <p:extLst>
       <p:ext uri="{BB962C8B-B14F-4D97-AF65-F5344CB8AC3E}">
@@ -18370,6 +18342,9 @@
                     <p:cTn id="3" fill="hold">
                       <p:stCondLst>
                         <p:cond delay="indefinite"/>
+                        <p:cond evt="onBegin" delay="0">
+                          <p:tn val="2"/>
+                        </p:cond>
                       </p:stCondLst>
                       <p:childTnLst>
                         <p:par>
@@ -18379,7 +18354,7 @@
                             </p:stCondLst>
                             <p:childTnLst>
                               <p:par>
-                                <p:cTn id="5" presetID="2" presetClass="entr" presetSubtype="4" fill="hold" grpId="0" nodeType="clickEffect">
+                                <p:cTn id="5" presetID="2" presetClass="entr" presetSubtype="4" fill="hold" grpId="0" nodeType="withEffect">
                                   <p:stCondLst>
                                     <p:cond delay="0"/>
                                   </p:stCondLst>
@@ -18392,7 +18367,7 @@
                                           </p:stCondLst>
                                         </p:cTn>
                                         <p:tgtEl>
-                                          <p:spTgt spid="6"/>
+                                          <p:spTgt spid="3"/>
                                         </p:tgtEl>
                                         <p:attrNameLst>
                                           <p:attrName>style.visibility</p:attrName>
@@ -18406,7 +18381,7 @@
                                       <p:cBhvr additive="base">
                                         <p:cTn id="7" dur="500" fill="hold"/>
                                         <p:tgtEl>
-                                          <p:spTgt spid="6"/>
+                                          <p:spTgt spid="3"/>
                                         </p:tgtEl>
                                         <p:attrNameLst>
                                           <p:attrName>ppt_x</p:attrName>
@@ -18428,79 +18403,6 @@
                                     <p:anim calcmode="lin" valueType="num">
                                       <p:cBhvr additive="base">
                                         <p:cTn id="8" dur="500" fill="hold"/>
-                                        <p:tgtEl>
-                                          <p:spTgt spid="6"/>
-                                        </p:tgtEl>
-                                        <p:attrNameLst>
-                                          <p:attrName>ppt_y</p:attrName>
-                                        </p:attrNameLst>
-                                      </p:cBhvr>
-                                      <p:tavLst>
-                                        <p:tav tm="0">
-                                          <p:val>
-                                            <p:strVal val="1+#ppt_h/2"/>
-                                          </p:val>
-                                        </p:tav>
-                                        <p:tav tm="100000">
-                                          <p:val>
-                                            <p:strVal val="#ppt_y"/>
-                                          </p:val>
-                                        </p:tav>
-                                      </p:tavLst>
-                                    </p:anim>
-                                  </p:childTnLst>
-                                </p:cTn>
-                              </p:par>
-                              <p:par>
-                                <p:cTn id="9" presetID="2" presetClass="entr" presetSubtype="4" fill="hold" grpId="0" nodeType="withEffect">
-                                  <p:stCondLst>
-                                    <p:cond delay="0"/>
-                                  </p:stCondLst>
-                                  <p:childTnLst>
-                                    <p:set>
-                                      <p:cBhvr>
-                                        <p:cTn id="10" dur="1" fill="hold">
-                                          <p:stCondLst>
-                                            <p:cond delay="0"/>
-                                          </p:stCondLst>
-                                        </p:cTn>
-                                        <p:tgtEl>
-                                          <p:spTgt spid="3"/>
-                                        </p:tgtEl>
-                                        <p:attrNameLst>
-                                          <p:attrName>style.visibility</p:attrName>
-                                        </p:attrNameLst>
-                                      </p:cBhvr>
-                                      <p:to>
-                                        <p:strVal val="visible"/>
-                                      </p:to>
-                                    </p:set>
-                                    <p:anim calcmode="lin" valueType="num">
-                                      <p:cBhvr additive="base">
-                                        <p:cTn id="11" dur="500" fill="hold"/>
-                                        <p:tgtEl>
-                                          <p:spTgt spid="3"/>
-                                        </p:tgtEl>
-                                        <p:attrNameLst>
-                                          <p:attrName>ppt_x</p:attrName>
-                                        </p:attrNameLst>
-                                      </p:cBhvr>
-                                      <p:tavLst>
-                                        <p:tav tm="0">
-                                          <p:val>
-                                            <p:strVal val="#ppt_x"/>
-                                          </p:val>
-                                        </p:tav>
-                                        <p:tav tm="100000">
-                                          <p:val>
-                                            <p:strVal val="#ppt_x"/>
-                                          </p:val>
-                                        </p:tav>
-                                      </p:tavLst>
-                                    </p:anim>
-                                    <p:anim calcmode="lin" valueType="num">
-                                      <p:cBhvr additive="base">
-                                        <p:cTn id="12" dur="500" fill="hold"/>
                                         <p:tgtEl>
                                           <p:spTgt spid="3"/>
                                         </p:tgtEl>
@@ -18553,7 +18455,6 @@
     </p:tnLst>
     <p:bldLst>
       <p:bldP spid="3" grpId="0" animBg="1"/>
-      <p:bldP spid="6" grpId="0"/>
     </p:bldLst>
   </p:timing>
 </p:sld>
@@ -24997,16 +24898,16 @@
               <a:t>    repeat test </a:t>
             </a:r>
             <a:r>
-              <a:rPr lang="en-US" sz="2800">
+              <a:rPr lang="en-US" sz="2800" dirty="0" err="1">
                 <a:cs typeface="Courier New" pitchFamily="34" charset="-120"/>
               </a:rPr>
-              <a:t>oper  </a:t>
+              <a:t>oper</a:t>
             </a:r>
             <a:r>
               <a:rPr lang="en-US" sz="2800" dirty="0">
                 <a:cs typeface="Courier New" pitchFamily="34" charset="-120"/>
               </a:rPr>
-              <a:t>-- recurse</a:t>
+              <a:t>  -- recurse</a:t>
             </a:r>
           </a:p>
         </p:txBody>

--- a/topic12-monads/unit-12a-lectures/talk-1/a-monads.pptx
+++ b/topic12-monads/unit-12a-lectures/talk-1/a-monads.pptx
@@ -9565,18 +9565,11 @@
           <a:p>
             <a:pPr algn="ctr" eaLnBrk="1" hangingPunct="1"/>
             <a:r>
-              <a:rPr kumimoji="1" lang="en-US" altLang="en-US" sz="2400">
-                <a:latin typeface="Tahoma" panose="020B0604030504040204" pitchFamily="34" charset="0"/>
-                <a:ea typeface="MS PGothic" panose="020B0600070205080204" pitchFamily="34" charset="-128"/>
-              </a:rPr>
-              <a:t>Topic 12 </a:t>
-            </a:r>
-            <a:r>
               <a:rPr kumimoji="1" lang="en-US" altLang="en-US" sz="2400" dirty="0">
                 <a:latin typeface="Tahoma" panose="020B0604030504040204" pitchFamily="34" charset="0"/>
                 <a:ea typeface="MS PGothic" panose="020B0600070205080204" pitchFamily="34" charset="-128"/>
               </a:rPr>
-              <a:t>– Monads</a:t>
+              <a:t>Topic 12 – Monads</a:t>
             </a:r>
           </a:p>
         </p:txBody>

--- a/topic12-monads/unit-12a-lectures/talk-1/a-monads.pptx
+++ b/topic12-monads/unit-12a-lectures/talk-1/a-monads.pptx
@@ -5,10 +5,10 @@
     <p:sldMasterId id="2147484299" r:id="rId1"/>
   </p:sldMasterIdLst>
   <p:notesMasterIdLst>
-    <p:notesMasterId r:id="rId33"/>
+    <p:notesMasterId r:id="rId35"/>
   </p:notesMasterIdLst>
   <p:handoutMasterIdLst>
-    <p:handoutMasterId r:id="rId34"/>
+    <p:handoutMasterId r:id="rId36"/>
   </p:handoutMasterIdLst>
   <p:sldIdLst>
     <p:sldId id="328" r:id="rId2"/>
@@ -41,7 +41,9 @@
     <p:sldId id="411" r:id="rId29"/>
     <p:sldId id="412" r:id="rId30"/>
     <p:sldId id="413" r:id="rId31"/>
-    <p:sldId id="343" r:id="rId32"/>
+    <p:sldId id="414" r:id="rId32"/>
+    <p:sldId id="415" r:id="rId33"/>
+    <p:sldId id="343" r:id="rId34"/>
   </p:sldIdLst>
   <p:sldSz cx="12192000" cy="6858000"/>
   <p:notesSz cx="7089775" cy="10218738"/>
@@ -1255,7 +1257,7 @@
               <a:pPr>
                 <a:defRPr/>
               </a:pPr>
-              <a:t>4/1/26</a:t>
+              <a:t>4/2/26</a:t>
             </a:fld>
             <a:endParaRPr lang="en-US" dirty="0"/>
           </a:p>
@@ -1699,7 +1701,7 @@
               <a:pPr>
                 <a:defRPr/>
               </a:pPr>
-              <a:t>4/1/26</a:t>
+              <a:t>4/2/26</a:t>
             </a:fld>
             <a:endParaRPr lang="en-US" dirty="0"/>
           </a:p>
@@ -2065,7 +2067,7 @@
               <a:pPr>
                 <a:defRPr/>
               </a:pPr>
-              <a:t>4/1/26</a:t>
+              <a:t>4/2/26</a:t>
             </a:fld>
             <a:endParaRPr lang="en-US" dirty="0"/>
           </a:p>
@@ -2500,7 +2502,7 @@
               <a:pPr>
                 <a:defRPr/>
               </a:pPr>
-              <a:t>4/1/26</a:t>
+              <a:t>4/2/26</a:t>
             </a:fld>
             <a:endParaRPr lang="en-US" dirty="0"/>
           </a:p>
@@ -3098,7 +3100,7 @@
               <a:pPr>
                 <a:defRPr/>
               </a:pPr>
-              <a:t>4/1/26</a:t>
+              <a:t>4/2/26</a:t>
             </a:fld>
             <a:endParaRPr lang="en-US" dirty="0"/>
           </a:p>
@@ -3809,7 +3811,7 @@
               <a:pPr>
                 <a:defRPr/>
               </a:pPr>
-              <a:t>4/1/26</a:t>
+              <a:t>4/2/26</a:t>
             </a:fld>
             <a:endParaRPr lang="en-US" dirty="0"/>
           </a:p>
@@ -4752,7 +4754,7 @@
               <a:pPr>
                 <a:defRPr/>
               </a:pPr>
-              <a:t>4/1/26</a:t>
+              <a:t>4/2/26</a:t>
             </a:fld>
             <a:endParaRPr lang="en-US" dirty="0"/>
           </a:p>
@@ -5095,7 +5097,7 @@
               <a:pPr>
                 <a:defRPr/>
               </a:pPr>
-              <a:t>4/1/26</a:t>
+              <a:t>4/2/26</a:t>
             </a:fld>
             <a:endParaRPr lang="en-US" dirty="0"/>
           </a:p>
@@ -5388,7 +5390,7 @@
               <a:pPr>
                 <a:defRPr/>
               </a:pPr>
-              <a:t>4/1/26</a:t>
+              <a:t>4/2/26</a:t>
             </a:fld>
             <a:endParaRPr lang="en-US" dirty="0"/>
           </a:p>
@@ -5740,7 +5742,7 @@
               <a:pPr>
                 <a:defRPr/>
               </a:pPr>
-              <a:t>4/1/26</a:t>
+              <a:t>4/2/26</a:t>
             </a:fld>
             <a:endParaRPr lang="en-US" dirty="0"/>
           </a:p>
@@ -6158,7 +6160,7 @@
               <a:pPr>
                 <a:defRPr/>
               </a:pPr>
-              <a:t>4/1/26</a:t>
+              <a:t>4/2/26</a:t>
             </a:fld>
             <a:endParaRPr lang="en-US" dirty="0"/>
           </a:p>
@@ -6563,7 +6565,7 @@
               <a:pPr>
                 <a:defRPr/>
               </a:pPr>
-              <a:t>4/1/26</a:t>
+              <a:t>4/2/26</a:t>
             </a:fld>
             <a:endParaRPr lang="en-US" dirty="0"/>
           </a:p>
@@ -7098,7 +7100,7 @@
               <a:pPr>
                 <a:defRPr/>
               </a:pPr>
-              <a:t>4/1/26</a:t>
+              <a:t>4/2/26</a:t>
             </a:fld>
             <a:endParaRPr lang="en-US" dirty="0"/>
           </a:p>
@@ -7384,7 +7386,7 @@
               <a:pPr>
                 <a:defRPr/>
               </a:pPr>
-              <a:t>4/1/26</a:t>
+              <a:t>4/2/26</a:t>
             </a:fld>
             <a:endParaRPr lang="en-US" dirty="0"/>
           </a:p>
@@ -7569,7 +7571,7 @@
               <a:pPr>
                 <a:defRPr/>
               </a:pPr>
-              <a:t>4/1/26</a:t>
+              <a:t>4/2/26</a:t>
             </a:fld>
             <a:endParaRPr lang="en-US" dirty="0"/>
           </a:p>
@@ -7988,7 +7990,7 @@
               <a:pPr>
                 <a:defRPr/>
               </a:pPr>
-              <a:t>4/1/26</a:t>
+              <a:t>4/2/26</a:t>
             </a:fld>
             <a:endParaRPr lang="en-US" dirty="0"/>
           </a:p>
@@ -8426,7 +8428,7 @@
               <a:pPr>
                 <a:defRPr/>
               </a:pPr>
-              <a:t>4/1/26</a:t>
+              <a:t>4/2/26</a:t>
             </a:fld>
             <a:endParaRPr lang="en-US" dirty="0"/>
           </a:p>
@@ -8685,7 +8687,7 @@
               <a:pPr>
                 <a:defRPr/>
               </a:pPr>
-              <a:t>4/1/26</a:t>
+              <a:t>4/2/26</a:t>
             </a:fld>
             <a:endParaRPr lang="en-US" dirty="0"/>
           </a:p>
@@ -12463,13 +12465,13 @@
   <p:clrMapOvr>
     <a:masterClrMapping/>
   </p:clrMapOvr>
-  <mc:AlternateContent xmlns:mc="http://schemas.openxmlformats.org/markup-compatibility/2006">
-    <mc:Choice xmlns:p159="http://schemas.microsoft.com/office/powerpoint/2015/09/main" Requires="p159">
+  <mc:AlternateContent xmlns:mc="http://schemas.openxmlformats.org/markup-compatibility/2006" xmlns:p159="http://schemas.microsoft.com/office/powerpoint/2015/09/main">
+    <mc:Choice Requires="p159">
       <p:transition xmlns:p14="http://schemas.microsoft.com/office/powerpoint/2010/main" spd="slow" p14:dur="2000">
         <p159:morph option="byObject"/>
       </p:transition>
     </mc:Choice>
-    <mc:Fallback>
+    <mc:Fallback xmlns="">
       <p:transition spd="slow">
         <p:fade/>
       </p:transition>
@@ -28212,6 +28214,1267 @@
 </file>
 
 <file path=ppt/slides/slide31.xml><?xml version="1.0" encoding="utf-8"?>
+<p:sld xmlns:a="http://schemas.openxmlformats.org/drawingml/2006/main" xmlns:r="http://schemas.openxmlformats.org/officeDocument/2006/relationships" xmlns:p="http://schemas.openxmlformats.org/presentationml/2006/main">
+  <p:cSld>
+    <p:spTree>
+      <p:nvGrpSpPr>
+        <p:cNvPr id="1" name=""/>
+        <p:cNvGrpSpPr/>
+        <p:nvPr/>
+      </p:nvGrpSpPr>
+      <p:grpSpPr>
+        <a:xfrm>
+          <a:off x="0" y="0"/>
+          <a:ext cx="0" cy="0"/>
+          <a:chOff x="0" y="0"/>
+          <a:chExt cx="0" cy="0"/>
+        </a:xfrm>
+      </p:grpSpPr>
+      <p:sp>
+        <p:nvSpPr>
+          <p:cNvPr id="2" name="Title 1">
+            <a:extLst>
+              <a:ext uri="{FF2B5EF4-FFF2-40B4-BE49-F238E27FC236}">
+                <a16:creationId xmlns:a16="http://schemas.microsoft.com/office/drawing/2014/main" id="{DFC3EC7E-226E-4DC7-77B2-790243A5185B}"/>
+              </a:ext>
+            </a:extLst>
+          </p:cNvPr>
+          <p:cNvSpPr>
+            <a:spLocks noGrp="1"/>
+          </p:cNvSpPr>
+          <p:nvPr>
+            <p:ph type="title"/>
+          </p:nvPr>
+        </p:nvSpPr>
+        <p:spPr/>
+        <p:txBody>
+          <a:bodyPr/>
+          <a:lstStyle/>
+          <a:p>
+            <a:r>
+              <a:rPr lang="en-US" dirty="0"/>
+              <a:t>Some more useful monadic functions</a:t>
+            </a:r>
+          </a:p>
+        </p:txBody>
+      </p:sp>
+      <p:sp>
+        <p:nvSpPr>
+          <p:cNvPr id="3" name="Content Placeholder 2">
+            <a:extLst>
+              <a:ext uri="{FF2B5EF4-FFF2-40B4-BE49-F238E27FC236}">
+                <a16:creationId xmlns:a16="http://schemas.microsoft.com/office/drawing/2014/main" id="{BF3A780D-3D83-FB41-8946-98F8440271C7}"/>
+              </a:ext>
+            </a:extLst>
+          </p:cNvPr>
+          <p:cNvSpPr>
+            <a:spLocks noGrp="1"/>
+          </p:cNvSpPr>
+          <p:nvPr>
+            <p:ph idx="1"/>
+          </p:nvPr>
+        </p:nvSpPr>
+        <p:spPr>
+          <a:xfrm>
+            <a:off x="680322" y="2336873"/>
+            <a:ext cx="5326940" cy="2327724"/>
+          </a:xfrm>
+          <a:solidFill>
+            <a:schemeClr val="accent1"/>
+          </a:solidFill>
+        </p:spPr>
+        <p:txBody>
+          <a:bodyPr/>
+          <a:lstStyle/>
+          <a:p>
+            <a:pPr marL="0" indent="0">
+              <a:buNone/>
+            </a:pPr>
+            <a:r>
+              <a:rPr lang="en-IE" dirty="0"/>
+              <a:t>sequence :: Monad m =&gt; [m a] -&gt; m [a]</a:t>
+            </a:r>
+          </a:p>
+          <a:p>
+            <a:pPr marL="0" indent="0">
+              <a:buNone/>
+            </a:pPr>
+            <a:r>
+              <a:rPr lang="en-IE" dirty="0"/>
+              <a:t>sequence [] = return [] </a:t>
+            </a:r>
+          </a:p>
+          <a:p>
+            <a:pPr marL="0" indent="0">
+              <a:buNone/>
+            </a:pPr>
+            <a:r>
+              <a:rPr lang="en-IE" dirty="0"/>
+              <a:t>sequence (</a:t>
+            </a:r>
+            <a:r>
+              <a:rPr lang="en-IE" dirty="0" err="1"/>
+              <a:t>m:ms</a:t>
+            </a:r>
+            <a:r>
+              <a:rPr lang="en-IE" dirty="0"/>
+              <a:t>) = do </a:t>
+            </a:r>
+          </a:p>
+          <a:p>
+            <a:pPr marL="0" indent="0">
+              <a:buNone/>
+            </a:pPr>
+            <a:r>
+              <a:rPr lang="en-IE" dirty="0"/>
+              <a:t>	x &lt;- m </a:t>
+            </a:r>
+          </a:p>
+          <a:p>
+            <a:pPr marL="0" indent="0">
+              <a:buNone/>
+            </a:pPr>
+            <a:r>
+              <a:rPr lang="en-IE" dirty="0"/>
+              <a:t>	</a:t>
+            </a:r>
+            <a:r>
+              <a:rPr lang="en-IE" dirty="0" err="1"/>
+              <a:t>xs</a:t>
+            </a:r>
+            <a:r>
+              <a:rPr lang="en-IE" dirty="0"/>
+              <a:t> &lt;- sequence </a:t>
+            </a:r>
+            <a:r>
+              <a:rPr lang="en-IE" dirty="0" err="1"/>
+              <a:t>ms</a:t>
+            </a:r>
+            <a:r>
+              <a:rPr lang="en-IE" dirty="0"/>
+              <a:t> </a:t>
+            </a:r>
+          </a:p>
+          <a:p>
+            <a:pPr marL="0" indent="0">
+              <a:buNone/>
+            </a:pPr>
+            <a:r>
+              <a:rPr lang="en-IE" dirty="0"/>
+              <a:t>	return (</a:t>
+            </a:r>
+            <a:r>
+              <a:rPr lang="en-IE" dirty="0" err="1"/>
+              <a:t>x:xs</a:t>
+            </a:r>
+            <a:r>
+              <a:rPr lang="en-IE" dirty="0"/>
+              <a:t>)</a:t>
+            </a:r>
+            <a:endParaRPr lang="en-US" dirty="0"/>
+          </a:p>
+        </p:txBody>
+      </p:sp>
+      <p:sp>
+        <p:nvSpPr>
+          <p:cNvPr id="4" name="Slide Number Placeholder 3">
+            <a:extLst>
+              <a:ext uri="{FF2B5EF4-FFF2-40B4-BE49-F238E27FC236}">
+                <a16:creationId xmlns:a16="http://schemas.microsoft.com/office/drawing/2014/main" id="{83FFF410-68B7-A79E-AB5B-656EA5264802}"/>
+              </a:ext>
+            </a:extLst>
+          </p:cNvPr>
+          <p:cNvSpPr>
+            <a:spLocks noGrp="1"/>
+          </p:cNvSpPr>
+          <p:nvPr>
+            <p:ph type="sldNum" sz="quarter" idx="12"/>
+          </p:nvPr>
+        </p:nvSpPr>
+        <p:spPr/>
+        <p:txBody>
+          <a:bodyPr/>
+          <a:lstStyle/>
+          <a:p>
+            <a:pPr>
+              <a:defRPr/>
+            </a:pPr>
+            <a:fld id="{BE203E6A-16B6-0645-AB6E-2D8EFE6BB347}" type="slidenum">
+              <a:rPr lang="en-US" altLang="en-US" smtClean="0"/>
+              <a:pPr>
+                <a:defRPr/>
+              </a:pPr>
+              <a:t>30</a:t>
+            </a:fld>
+            <a:endParaRPr lang="en-US" altLang="en-US"/>
+          </a:p>
+        </p:txBody>
+      </p:sp>
+      <p:sp>
+        <p:nvSpPr>
+          <p:cNvPr id="5" name="TextBox 4">
+            <a:extLst>
+              <a:ext uri="{FF2B5EF4-FFF2-40B4-BE49-F238E27FC236}">
+                <a16:creationId xmlns:a16="http://schemas.microsoft.com/office/drawing/2014/main" id="{B0A63A59-DABD-1B8E-E2F1-8579776AA29F}"/>
+              </a:ext>
+            </a:extLst>
+          </p:cNvPr>
+          <p:cNvSpPr txBox="1"/>
+          <p:nvPr/>
+        </p:nvSpPr>
+        <p:spPr>
+          <a:xfrm>
+            <a:off x="680321" y="5584398"/>
+            <a:ext cx="7812505" cy="646331"/>
+          </a:xfrm>
+          <a:prstGeom prst="rect">
+            <a:avLst/>
+          </a:prstGeom>
+          <a:solidFill>
+            <a:schemeClr val="accent1"/>
+          </a:solidFill>
+        </p:spPr>
+        <p:txBody>
+          <a:bodyPr wrap="square" rtlCol="0">
+            <a:spAutoFit/>
+          </a:bodyPr>
+          <a:lstStyle/>
+          <a:p>
+            <a:pPr marL="285750" indent="-285750">
+              <a:buFont typeface="Wingdings" pitchFamily="2" charset="2"/>
+              <a:buChar char="Ø"/>
+            </a:pPr>
+            <a:r>
+              <a:rPr lang="en-IE" dirty="0"/>
+              <a:t>sequence [Just 1, Just 2, Just 3] -- Just [1, 2, 3] </a:t>
+            </a:r>
+          </a:p>
+          <a:p>
+            <a:pPr marL="285750" indent="-285750">
+              <a:buFont typeface="Wingdings" pitchFamily="2" charset="2"/>
+              <a:buChar char="Ø"/>
+            </a:pPr>
+            <a:r>
+              <a:rPr lang="en-IE" dirty="0"/>
+              <a:t>sequence [Just 1, Nothing, Just 3] -- Nothing</a:t>
+            </a:r>
+            <a:endParaRPr lang="en-US" dirty="0"/>
+          </a:p>
+        </p:txBody>
+      </p:sp>
+      <p:sp>
+        <p:nvSpPr>
+          <p:cNvPr id="6" name="TextBox 5">
+            <a:extLst>
+              <a:ext uri="{FF2B5EF4-FFF2-40B4-BE49-F238E27FC236}">
+                <a16:creationId xmlns:a16="http://schemas.microsoft.com/office/drawing/2014/main" id="{14BFB32F-C4AB-F405-337D-D7DF9CB3C08C}"/>
+              </a:ext>
+            </a:extLst>
+          </p:cNvPr>
+          <p:cNvSpPr txBox="1"/>
+          <p:nvPr/>
+        </p:nvSpPr>
+        <p:spPr>
+          <a:xfrm>
+            <a:off x="680321" y="4939831"/>
+            <a:ext cx="4132311" cy="369332"/>
+          </a:xfrm>
+          <a:prstGeom prst="rect">
+            <a:avLst/>
+          </a:prstGeom>
+          <a:noFill/>
+        </p:spPr>
+        <p:txBody>
+          <a:bodyPr wrap="square" rtlCol="0">
+            <a:spAutoFit/>
+          </a:bodyPr>
+          <a:lstStyle/>
+          <a:p>
+            <a:r>
+              <a:rPr lang="en-US" dirty="0"/>
+              <a:t>Example runs: </a:t>
+            </a:r>
+          </a:p>
+        </p:txBody>
+      </p:sp>
+    </p:spTree>
+    <p:extLst>
+      <p:ext uri="{BB962C8B-B14F-4D97-AF65-F5344CB8AC3E}">
+        <p14:creationId xmlns:p14="http://schemas.microsoft.com/office/powerpoint/2010/main" val="3124168043"/>
+      </p:ext>
+    </p:extLst>
+  </p:cSld>
+  <p:clrMapOvr>
+    <a:masterClrMapping/>
+  </p:clrMapOvr>
+  <p:timing>
+    <p:tnLst>
+      <p:par>
+        <p:cTn id="1" dur="indefinite" restart="never" nodeType="tmRoot">
+          <p:childTnLst>
+            <p:seq concurrent="1" nextAc="seek">
+              <p:cTn id="2" dur="indefinite" nodeType="mainSeq">
+                <p:childTnLst>
+                  <p:par>
+                    <p:cTn id="3" fill="hold">
+                      <p:stCondLst>
+                        <p:cond delay="indefinite"/>
+                      </p:stCondLst>
+                      <p:childTnLst>
+                        <p:par>
+                          <p:cTn id="4" fill="hold">
+                            <p:stCondLst>
+                              <p:cond delay="0"/>
+                            </p:stCondLst>
+                            <p:childTnLst>
+                              <p:par>
+                                <p:cTn id="5" presetID="2" presetClass="entr" presetSubtype="4" fill="hold" grpId="0" nodeType="clickEffect">
+                                  <p:stCondLst>
+                                    <p:cond delay="0"/>
+                                  </p:stCondLst>
+                                  <p:childTnLst>
+                                    <p:set>
+                                      <p:cBhvr>
+                                        <p:cTn id="6" dur="1" fill="hold">
+                                          <p:stCondLst>
+                                            <p:cond delay="0"/>
+                                          </p:stCondLst>
+                                        </p:cTn>
+                                        <p:tgtEl>
+                                          <p:spTgt spid="3"/>
+                                        </p:tgtEl>
+                                        <p:attrNameLst>
+                                          <p:attrName>style.visibility</p:attrName>
+                                        </p:attrNameLst>
+                                      </p:cBhvr>
+                                      <p:to>
+                                        <p:strVal val="visible"/>
+                                      </p:to>
+                                    </p:set>
+                                    <p:anim calcmode="lin" valueType="num">
+                                      <p:cBhvr additive="base">
+                                        <p:cTn id="7" dur="500" fill="hold"/>
+                                        <p:tgtEl>
+                                          <p:spTgt spid="3"/>
+                                        </p:tgtEl>
+                                        <p:attrNameLst>
+                                          <p:attrName>ppt_x</p:attrName>
+                                        </p:attrNameLst>
+                                      </p:cBhvr>
+                                      <p:tavLst>
+                                        <p:tav tm="0">
+                                          <p:val>
+                                            <p:strVal val="#ppt_x"/>
+                                          </p:val>
+                                        </p:tav>
+                                        <p:tav tm="100000">
+                                          <p:val>
+                                            <p:strVal val="#ppt_x"/>
+                                          </p:val>
+                                        </p:tav>
+                                      </p:tavLst>
+                                    </p:anim>
+                                    <p:anim calcmode="lin" valueType="num">
+                                      <p:cBhvr additive="base">
+                                        <p:cTn id="8" dur="500" fill="hold"/>
+                                        <p:tgtEl>
+                                          <p:spTgt spid="3"/>
+                                        </p:tgtEl>
+                                        <p:attrNameLst>
+                                          <p:attrName>ppt_y</p:attrName>
+                                        </p:attrNameLst>
+                                      </p:cBhvr>
+                                      <p:tavLst>
+                                        <p:tav tm="0">
+                                          <p:val>
+                                            <p:strVal val="1+#ppt_h/2"/>
+                                          </p:val>
+                                        </p:tav>
+                                        <p:tav tm="100000">
+                                          <p:val>
+                                            <p:strVal val="#ppt_y"/>
+                                          </p:val>
+                                        </p:tav>
+                                      </p:tavLst>
+                                    </p:anim>
+                                  </p:childTnLst>
+                                </p:cTn>
+                              </p:par>
+                            </p:childTnLst>
+                          </p:cTn>
+                        </p:par>
+                      </p:childTnLst>
+                    </p:cTn>
+                  </p:par>
+                  <p:par>
+                    <p:cTn id="9" fill="hold">
+                      <p:stCondLst>
+                        <p:cond delay="indefinite"/>
+                      </p:stCondLst>
+                      <p:childTnLst>
+                        <p:par>
+                          <p:cTn id="10" fill="hold">
+                            <p:stCondLst>
+                              <p:cond delay="0"/>
+                            </p:stCondLst>
+                            <p:childTnLst>
+                              <p:par>
+                                <p:cTn id="11" presetID="2" presetClass="entr" presetSubtype="4" fill="hold" grpId="0" nodeType="clickEffect">
+                                  <p:stCondLst>
+                                    <p:cond delay="0"/>
+                                  </p:stCondLst>
+                                  <p:childTnLst>
+                                    <p:set>
+                                      <p:cBhvr>
+                                        <p:cTn id="12" dur="1" fill="hold">
+                                          <p:stCondLst>
+                                            <p:cond delay="0"/>
+                                          </p:stCondLst>
+                                        </p:cTn>
+                                        <p:tgtEl>
+                                          <p:spTgt spid="6"/>
+                                        </p:tgtEl>
+                                        <p:attrNameLst>
+                                          <p:attrName>style.visibility</p:attrName>
+                                        </p:attrNameLst>
+                                      </p:cBhvr>
+                                      <p:to>
+                                        <p:strVal val="visible"/>
+                                      </p:to>
+                                    </p:set>
+                                    <p:anim calcmode="lin" valueType="num">
+                                      <p:cBhvr additive="base">
+                                        <p:cTn id="13" dur="500" fill="hold"/>
+                                        <p:tgtEl>
+                                          <p:spTgt spid="6"/>
+                                        </p:tgtEl>
+                                        <p:attrNameLst>
+                                          <p:attrName>ppt_x</p:attrName>
+                                        </p:attrNameLst>
+                                      </p:cBhvr>
+                                      <p:tavLst>
+                                        <p:tav tm="0">
+                                          <p:val>
+                                            <p:strVal val="#ppt_x"/>
+                                          </p:val>
+                                        </p:tav>
+                                        <p:tav tm="100000">
+                                          <p:val>
+                                            <p:strVal val="#ppt_x"/>
+                                          </p:val>
+                                        </p:tav>
+                                      </p:tavLst>
+                                    </p:anim>
+                                    <p:anim calcmode="lin" valueType="num">
+                                      <p:cBhvr additive="base">
+                                        <p:cTn id="14" dur="500" fill="hold"/>
+                                        <p:tgtEl>
+                                          <p:spTgt spid="6"/>
+                                        </p:tgtEl>
+                                        <p:attrNameLst>
+                                          <p:attrName>ppt_y</p:attrName>
+                                        </p:attrNameLst>
+                                      </p:cBhvr>
+                                      <p:tavLst>
+                                        <p:tav tm="0">
+                                          <p:val>
+                                            <p:strVal val="1+#ppt_h/2"/>
+                                          </p:val>
+                                        </p:tav>
+                                        <p:tav tm="100000">
+                                          <p:val>
+                                            <p:strVal val="#ppt_y"/>
+                                          </p:val>
+                                        </p:tav>
+                                      </p:tavLst>
+                                    </p:anim>
+                                  </p:childTnLst>
+                                </p:cTn>
+                              </p:par>
+                            </p:childTnLst>
+                          </p:cTn>
+                        </p:par>
+                      </p:childTnLst>
+                    </p:cTn>
+                  </p:par>
+                  <p:par>
+                    <p:cTn id="15" fill="hold">
+                      <p:stCondLst>
+                        <p:cond delay="indefinite"/>
+                      </p:stCondLst>
+                      <p:childTnLst>
+                        <p:par>
+                          <p:cTn id="16" fill="hold">
+                            <p:stCondLst>
+                              <p:cond delay="0"/>
+                            </p:stCondLst>
+                            <p:childTnLst>
+                              <p:par>
+                                <p:cTn id="17" presetID="2" presetClass="entr" presetSubtype="4" fill="hold" grpId="0" nodeType="clickEffect">
+                                  <p:stCondLst>
+                                    <p:cond delay="0"/>
+                                  </p:stCondLst>
+                                  <p:childTnLst>
+                                    <p:set>
+                                      <p:cBhvr>
+                                        <p:cTn id="18" dur="1" fill="hold">
+                                          <p:stCondLst>
+                                            <p:cond delay="0"/>
+                                          </p:stCondLst>
+                                        </p:cTn>
+                                        <p:tgtEl>
+                                          <p:spTgt spid="5"/>
+                                        </p:tgtEl>
+                                        <p:attrNameLst>
+                                          <p:attrName>style.visibility</p:attrName>
+                                        </p:attrNameLst>
+                                      </p:cBhvr>
+                                      <p:to>
+                                        <p:strVal val="visible"/>
+                                      </p:to>
+                                    </p:set>
+                                    <p:anim calcmode="lin" valueType="num">
+                                      <p:cBhvr additive="base">
+                                        <p:cTn id="19" dur="500" fill="hold"/>
+                                        <p:tgtEl>
+                                          <p:spTgt spid="5"/>
+                                        </p:tgtEl>
+                                        <p:attrNameLst>
+                                          <p:attrName>ppt_x</p:attrName>
+                                        </p:attrNameLst>
+                                      </p:cBhvr>
+                                      <p:tavLst>
+                                        <p:tav tm="0">
+                                          <p:val>
+                                            <p:strVal val="#ppt_x"/>
+                                          </p:val>
+                                        </p:tav>
+                                        <p:tav tm="100000">
+                                          <p:val>
+                                            <p:strVal val="#ppt_x"/>
+                                          </p:val>
+                                        </p:tav>
+                                      </p:tavLst>
+                                    </p:anim>
+                                    <p:anim calcmode="lin" valueType="num">
+                                      <p:cBhvr additive="base">
+                                        <p:cTn id="20" dur="500" fill="hold"/>
+                                        <p:tgtEl>
+                                          <p:spTgt spid="5"/>
+                                        </p:tgtEl>
+                                        <p:attrNameLst>
+                                          <p:attrName>ppt_y</p:attrName>
+                                        </p:attrNameLst>
+                                      </p:cBhvr>
+                                      <p:tavLst>
+                                        <p:tav tm="0">
+                                          <p:val>
+                                            <p:strVal val="1+#ppt_h/2"/>
+                                          </p:val>
+                                        </p:tav>
+                                        <p:tav tm="100000">
+                                          <p:val>
+                                            <p:strVal val="#ppt_y"/>
+                                          </p:val>
+                                        </p:tav>
+                                      </p:tavLst>
+                                    </p:anim>
+                                  </p:childTnLst>
+                                </p:cTn>
+                              </p:par>
+                            </p:childTnLst>
+                          </p:cTn>
+                        </p:par>
+                      </p:childTnLst>
+                    </p:cTn>
+                  </p:par>
+                </p:childTnLst>
+              </p:cTn>
+              <p:prevCondLst>
+                <p:cond evt="onPrev" delay="0">
+                  <p:tgtEl>
+                    <p:sldTgt/>
+                  </p:tgtEl>
+                </p:cond>
+              </p:prevCondLst>
+              <p:nextCondLst>
+                <p:cond evt="onNext" delay="0">
+                  <p:tgtEl>
+                    <p:sldTgt/>
+                  </p:tgtEl>
+                </p:cond>
+              </p:nextCondLst>
+            </p:seq>
+          </p:childTnLst>
+        </p:cTn>
+      </p:par>
+    </p:tnLst>
+    <p:bldLst>
+      <p:bldP spid="3" grpId="0" animBg="1"/>
+      <p:bldP spid="5" grpId="0" animBg="1"/>
+      <p:bldP spid="6" grpId="0"/>
+    </p:bldLst>
+  </p:timing>
+</p:sld>
+</file>
+
+<file path=ppt/slides/slide32.xml><?xml version="1.0" encoding="utf-8"?>
+<p:sld xmlns:a="http://schemas.openxmlformats.org/drawingml/2006/main" xmlns:r="http://schemas.openxmlformats.org/officeDocument/2006/relationships" xmlns:p="http://schemas.openxmlformats.org/presentationml/2006/main">
+  <p:cSld>
+    <p:spTree>
+      <p:nvGrpSpPr>
+        <p:cNvPr id="1" name="">
+          <a:extLst>
+            <a:ext uri="{FF2B5EF4-FFF2-40B4-BE49-F238E27FC236}">
+              <a16:creationId xmlns:a16="http://schemas.microsoft.com/office/drawing/2014/main" id="{E47359B1-7566-EFA0-AD0F-DD39C74A6B19}"/>
+            </a:ext>
+          </a:extLst>
+        </p:cNvPr>
+        <p:cNvGrpSpPr/>
+        <p:nvPr/>
+      </p:nvGrpSpPr>
+      <p:grpSpPr>
+        <a:xfrm>
+          <a:off x="0" y="0"/>
+          <a:ext cx="0" cy="0"/>
+          <a:chOff x="0" y="0"/>
+          <a:chExt cx="0" cy="0"/>
+        </a:xfrm>
+      </p:grpSpPr>
+      <p:sp>
+        <p:nvSpPr>
+          <p:cNvPr id="2" name="Title 1">
+            <a:extLst>
+              <a:ext uri="{FF2B5EF4-FFF2-40B4-BE49-F238E27FC236}">
+                <a16:creationId xmlns:a16="http://schemas.microsoft.com/office/drawing/2014/main" id="{F27A369F-E661-895E-BDF2-3099E39FA0AB}"/>
+              </a:ext>
+            </a:extLst>
+          </p:cNvPr>
+          <p:cNvSpPr>
+            <a:spLocks noGrp="1"/>
+          </p:cNvSpPr>
+          <p:nvPr>
+            <p:ph type="title"/>
+          </p:nvPr>
+        </p:nvSpPr>
+        <p:spPr/>
+        <p:txBody>
+          <a:bodyPr/>
+          <a:lstStyle/>
+          <a:p>
+            <a:r>
+              <a:rPr lang="en-US" dirty="0"/>
+              <a:t>Some more useful monadic functions</a:t>
+            </a:r>
+          </a:p>
+        </p:txBody>
+      </p:sp>
+      <p:sp>
+        <p:nvSpPr>
+          <p:cNvPr id="3" name="Content Placeholder 2">
+            <a:extLst>
+              <a:ext uri="{FF2B5EF4-FFF2-40B4-BE49-F238E27FC236}">
+                <a16:creationId xmlns:a16="http://schemas.microsoft.com/office/drawing/2014/main" id="{8B5AE944-C066-7237-B165-BD1E7B9B3B59}"/>
+              </a:ext>
+            </a:extLst>
+          </p:cNvPr>
+          <p:cNvSpPr>
+            <a:spLocks noGrp="1"/>
+          </p:cNvSpPr>
+          <p:nvPr>
+            <p:ph idx="1"/>
+          </p:nvPr>
+        </p:nvSpPr>
+        <p:spPr>
+          <a:xfrm>
+            <a:off x="680322" y="2336873"/>
+            <a:ext cx="7709700" cy="855506"/>
+          </a:xfrm>
+          <a:solidFill>
+            <a:schemeClr val="accent1"/>
+          </a:solidFill>
+        </p:spPr>
+        <p:txBody>
+          <a:bodyPr>
+            <a:noAutofit/>
+          </a:bodyPr>
+          <a:lstStyle/>
+          <a:p>
+            <a:pPr marL="0" indent="0">
+              <a:buNone/>
+            </a:pPr>
+            <a:r>
+              <a:rPr lang="en-IE" sz="2400" dirty="0" err="1"/>
+              <a:t>mapM</a:t>
+            </a:r>
+            <a:r>
+              <a:rPr lang="en-IE" sz="2400" dirty="0"/>
+              <a:t> :: Monad m =&gt; (a -&gt; m b) -&gt; [a] -&gt; m [b]</a:t>
+            </a:r>
+          </a:p>
+          <a:p>
+            <a:pPr marL="0" indent="0">
+              <a:buNone/>
+            </a:pPr>
+            <a:r>
+              <a:rPr lang="en-IE" sz="2400" dirty="0" err="1"/>
+              <a:t>mapM</a:t>
+            </a:r>
+            <a:r>
+              <a:rPr lang="en-IE" sz="2400" dirty="0"/>
+              <a:t> f </a:t>
+            </a:r>
+            <a:r>
+              <a:rPr lang="en-IE" sz="2400" dirty="0" err="1"/>
+              <a:t>xs</a:t>
+            </a:r>
+            <a:r>
+              <a:rPr lang="en-IE" sz="2400" dirty="0"/>
+              <a:t> = sequence (map f </a:t>
+            </a:r>
+            <a:r>
+              <a:rPr lang="en-IE" sz="2400" dirty="0" err="1"/>
+              <a:t>xs</a:t>
+            </a:r>
+            <a:r>
+              <a:rPr lang="en-IE" sz="2400" dirty="0"/>
+              <a:t>)</a:t>
+            </a:r>
+            <a:endParaRPr lang="en-US" sz="2400" dirty="0"/>
+          </a:p>
+        </p:txBody>
+      </p:sp>
+      <p:sp>
+        <p:nvSpPr>
+          <p:cNvPr id="4" name="Slide Number Placeholder 3">
+            <a:extLst>
+              <a:ext uri="{FF2B5EF4-FFF2-40B4-BE49-F238E27FC236}">
+                <a16:creationId xmlns:a16="http://schemas.microsoft.com/office/drawing/2014/main" id="{4EF2ADA5-4F5C-1532-B6F1-FC81E50512EE}"/>
+              </a:ext>
+            </a:extLst>
+          </p:cNvPr>
+          <p:cNvSpPr>
+            <a:spLocks noGrp="1"/>
+          </p:cNvSpPr>
+          <p:nvPr>
+            <p:ph type="sldNum" sz="quarter" idx="12"/>
+          </p:nvPr>
+        </p:nvSpPr>
+        <p:spPr/>
+        <p:txBody>
+          <a:bodyPr/>
+          <a:lstStyle/>
+          <a:p>
+            <a:pPr>
+              <a:defRPr/>
+            </a:pPr>
+            <a:fld id="{BE203E6A-16B6-0645-AB6E-2D8EFE6BB347}" type="slidenum">
+              <a:rPr lang="en-US" altLang="en-US" smtClean="0"/>
+              <a:pPr>
+                <a:defRPr/>
+              </a:pPr>
+              <a:t>31</a:t>
+            </a:fld>
+            <a:endParaRPr lang="en-US" altLang="en-US"/>
+          </a:p>
+        </p:txBody>
+      </p:sp>
+      <p:sp>
+        <p:nvSpPr>
+          <p:cNvPr id="5" name="TextBox 4">
+            <a:extLst>
+              <a:ext uri="{FF2B5EF4-FFF2-40B4-BE49-F238E27FC236}">
+                <a16:creationId xmlns:a16="http://schemas.microsoft.com/office/drawing/2014/main" id="{9279E552-93EE-4B67-5A80-DFC99170131A}"/>
+              </a:ext>
+            </a:extLst>
+          </p:cNvPr>
+          <p:cNvSpPr txBox="1"/>
+          <p:nvPr/>
+        </p:nvSpPr>
+        <p:spPr>
+          <a:xfrm>
+            <a:off x="680321" y="5147228"/>
+            <a:ext cx="11511679" cy="1200329"/>
+          </a:xfrm>
+          <a:prstGeom prst="rect">
+            <a:avLst/>
+          </a:prstGeom>
+          <a:solidFill>
+            <a:schemeClr val="accent1"/>
+          </a:solidFill>
+        </p:spPr>
+        <p:txBody>
+          <a:bodyPr wrap="square" rtlCol="0">
+            <a:spAutoFit/>
+          </a:bodyPr>
+          <a:lstStyle/>
+          <a:p>
+            <a:pPr marL="285750" indent="-285750">
+              <a:buFont typeface="Wingdings" pitchFamily="2" charset="2"/>
+              <a:buChar char="Ø"/>
+            </a:pPr>
+            <a:r>
+              <a:rPr lang="en-IE" sz="2400" dirty="0" err="1"/>
+              <a:t>mapM</a:t>
+            </a:r>
+            <a:r>
+              <a:rPr lang="en-IE" sz="2400" dirty="0"/>
+              <a:t> </a:t>
+            </a:r>
+            <a:r>
+              <a:rPr lang="en-IE" sz="2400" dirty="0" err="1"/>
+              <a:t>safeHead</a:t>
+            </a:r>
+            <a:r>
+              <a:rPr lang="en-IE" sz="2400" dirty="0"/>
+              <a:t> [[1,2], [3,4], [5,6]] -- Just [1,3,5] </a:t>
+            </a:r>
+          </a:p>
+          <a:p>
+            <a:endParaRPr lang="en-IE" sz="2400" dirty="0"/>
+          </a:p>
+          <a:p>
+            <a:pPr marL="285750" indent="-285750">
+              <a:buFont typeface="Wingdings" pitchFamily="2" charset="2"/>
+              <a:buChar char="Ø"/>
+            </a:pPr>
+            <a:r>
+              <a:rPr lang="en-IE" sz="2400" dirty="0" err="1"/>
+              <a:t>mapM</a:t>
+            </a:r>
+            <a:r>
+              <a:rPr lang="en-IE" sz="2400" dirty="0"/>
+              <a:t> </a:t>
+            </a:r>
+            <a:r>
+              <a:rPr lang="en-IE" sz="2400" dirty="0" err="1"/>
+              <a:t>safeHead</a:t>
+            </a:r>
+            <a:r>
+              <a:rPr lang="en-IE" sz="2400" dirty="0"/>
+              <a:t> [[1,2], [], [5,6]] -- Nothing (one failure kills the whole thing)</a:t>
+            </a:r>
+            <a:endParaRPr lang="en-US" sz="2400" dirty="0"/>
+          </a:p>
+        </p:txBody>
+      </p:sp>
+      <p:sp>
+        <p:nvSpPr>
+          <p:cNvPr id="6" name="TextBox 5">
+            <a:extLst>
+              <a:ext uri="{FF2B5EF4-FFF2-40B4-BE49-F238E27FC236}">
+                <a16:creationId xmlns:a16="http://schemas.microsoft.com/office/drawing/2014/main" id="{27C6C8D1-6760-57AE-FAD4-2D3DB9264836}"/>
+              </a:ext>
+            </a:extLst>
+          </p:cNvPr>
+          <p:cNvSpPr txBox="1"/>
+          <p:nvPr/>
+        </p:nvSpPr>
+        <p:spPr>
+          <a:xfrm>
+            <a:off x="680321" y="4293500"/>
+            <a:ext cx="4132311" cy="523220"/>
+          </a:xfrm>
+          <a:prstGeom prst="rect">
+            <a:avLst/>
+          </a:prstGeom>
+          <a:noFill/>
+        </p:spPr>
+        <p:txBody>
+          <a:bodyPr wrap="square" rtlCol="0">
+            <a:spAutoFit/>
+          </a:bodyPr>
+          <a:lstStyle/>
+          <a:p>
+            <a:r>
+              <a:rPr lang="en-US" sz="2800" dirty="0"/>
+              <a:t>Example runs: </a:t>
+            </a:r>
+          </a:p>
+        </p:txBody>
+      </p:sp>
+      <p:sp>
+        <p:nvSpPr>
+          <p:cNvPr id="8" name="TextBox 7">
+            <a:extLst>
+              <a:ext uri="{FF2B5EF4-FFF2-40B4-BE49-F238E27FC236}">
+                <a16:creationId xmlns:a16="http://schemas.microsoft.com/office/drawing/2014/main" id="{0889B72D-B682-5B30-C229-AF4320F0D621}"/>
+              </a:ext>
+            </a:extLst>
+          </p:cNvPr>
+          <p:cNvSpPr txBox="1"/>
+          <p:nvPr/>
+        </p:nvSpPr>
+        <p:spPr>
+          <a:xfrm>
+            <a:off x="680321" y="3467614"/>
+            <a:ext cx="10180184" cy="707886"/>
+          </a:xfrm>
+          <a:prstGeom prst="rect">
+            <a:avLst/>
+          </a:prstGeom>
+          <a:solidFill>
+            <a:schemeClr val="accent4"/>
+          </a:solidFill>
+        </p:spPr>
+        <p:txBody>
+          <a:bodyPr wrap="square">
+            <a:spAutoFit/>
+          </a:bodyPr>
+          <a:lstStyle/>
+          <a:p>
+            <a:r>
+              <a:rPr lang="en-IE" sz="2000" dirty="0">
+                <a:latin typeface="Courier New" panose="02070309020205020404" pitchFamily="49" charset="0"/>
+              </a:rPr>
+              <a:t>map f </a:t>
+            </a:r>
+            <a:r>
+              <a:rPr lang="en-IE" sz="2000" dirty="0" err="1">
+                <a:latin typeface="Courier New" panose="02070309020205020404" pitchFamily="49" charset="0"/>
+              </a:rPr>
+              <a:t>xs</a:t>
+            </a:r>
+            <a:r>
+              <a:rPr lang="en-IE" sz="2000" dirty="0"/>
+              <a:t> produces a list of monadic actions, and </a:t>
+            </a:r>
+            <a:r>
+              <a:rPr lang="en-IE" sz="2000" dirty="0">
+                <a:latin typeface="Courier New" panose="02070309020205020404" pitchFamily="49" charset="0"/>
+              </a:rPr>
+              <a:t>sequence</a:t>
+            </a:r>
+            <a:r>
+              <a:rPr lang="en-IE" sz="2000" dirty="0"/>
+              <a:t> runs them left to right, threading the monad through and collecting results.</a:t>
+            </a:r>
+            <a:endParaRPr lang="en-US" sz="2000" dirty="0"/>
+          </a:p>
+        </p:txBody>
+      </p:sp>
+    </p:spTree>
+    <p:extLst>
+      <p:ext uri="{BB962C8B-B14F-4D97-AF65-F5344CB8AC3E}">
+        <p14:creationId xmlns:p14="http://schemas.microsoft.com/office/powerpoint/2010/main" val="3908966082"/>
+      </p:ext>
+    </p:extLst>
+  </p:cSld>
+  <p:clrMapOvr>
+    <a:masterClrMapping/>
+  </p:clrMapOvr>
+  <p:timing>
+    <p:tnLst>
+      <p:par>
+        <p:cTn id="1" dur="indefinite" restart="never" nodeType="tmRoot">
+          <p:childTnLst>
+            <p:seq concurrent="1" nextAc="seek">
+              <p:cTn id="2" dur="indefinite" nodeType="mainSeq">
+                <p:childTnLst>
+                  <p:par>
+                    <p:cTn id="3" fill="hold">
+                      <p:stCondLst>
+                        <p:cond delay="indefinite"/>
+                      </p:stCondLst>
+                      <p:childTnLst>
+                        <p:par>
+                          <p:cTn id="4" fill="hold">
+                            <p:stCondLst>
+                              <p:cond delay="0"/>
+                            </p:stCondLst>
+                            <p:childTnLst>
+                              <p:par>
+                                <p:cTn id="5" presetID="2" presetClass="entr" presetSubtype="4" fill="hold" grpId="0" nodeType="clickEffect">
+                                  <p:stCondLst>
+                                    <p:cond delay="0"/>
+                                  </p:stCondLst>
+                                  <p:childTnLst>
+                                    <p:set>
+                                      <p:cBhvr>
+                                        <p:cTn id="6" dur="1" fill="hold">
+                                          <p:stCondLst>
+                                            <p:cond delay="0"/>
+                                          </p:stCondLst>
+                                        </p:cTn>
+                                        <p:tgtEl>
+                                          <p:spTgt spid="3"/>
+                                        </p:tgtEl>
+                                        <p:attrNameLst>
+                                          <p:attrName>style.visibility</p:attrName>
+                                        </p:attrNameLst>
+                                      </p:cBhvr>
+                                      <p:to>
+                                        <p:strVal val="visible"/>
+                                      </p:to>
+                                    </p:set>
+                                    <p:anim calcmode="lin" valueType="num">
+                                      <p:cBhvr additive="base">
+                                        <p:cTn id="7" dur="500" fill="hold"/>
+                                        <p:tgtEl>
+                                          <p:spTgt spid="3"/>
+                                        </p:tgtEl>
+                                        <p:attrNameLst>
+                                          <p:attrName>ppt_x</p:attrName>
+                                        </p:attrNameLst>
+                                      </p:cBhvr>
+                                      <p:tavLst>
+                                        <p:tav tm="0">
+                                          <p:val>
+                                            <p:strVal val="#ppt_x"/>
+                                          </p:val>
+                                        </p:tav>
+                                        <p:tav tm="100000">
+                                          <p:val>
+                                            <p:strVal val="#ppt_x"/>
+                                          </p:val>
+                                        </p:tav>
+                                      </p:tavLst>
+                                    </p:anim>
+                                    <p:anim calcmode="lin" valueType="num">
+                                      <p:cBhvr additive="base">
+                                        <p:cTn id="8" dur="500" fill="hold"/>
+                                        <p:tgtEl>
+                                          <p:spTgt spid="3"/>
+                                        </p:tgtEl>
+                                        <p:attrNameLst>
+                                          <p:attrName>ppt_y</p:attrName>
+                                        </p:attrNameLst>
+                                      </p:cBhvr>
+                                      <p:tavLst>
+                                        <p:tav tm="0">
+                                          <p:val>
+                                            <p:strVal val="1+#ppt_h/2"/>
+                                          </p:val>
+                                        </p:tav>
+                                        <p:tav tm="100000">
+                                          <p:val>
+                                            <p:strVal val="#ppt_y"/>
+                                          </p:val>
+                                        </p:tav>
+                                      </p:tavLst>
+                                    </p:anim>
+                                  </p:childTnLst>
+                                </p:cTn>
+                              </p:par>
+                            </p:childTnLst>
+                          </p:cTn>
+                        </p:par>
+                      </p:childTnLst>
+                    </p:cTn>
+                  </p:par>
+                  <p:par>
+                    <p:cTn id="9" fill="hold">
+                      <p:stCondLst>
+                        <p:cond delay="indefinite"/>
+                      </p:stCondLst>
+                      <p:childTnLst>
+                        <p:par>
+                          <p:cTn id="10" fill="hold">
+                            <p:stCondLst>
+                              <p:cond delay="0"/>
+                            </p:stCondLst>
+                            <p:childTnLst>
+                              <p:par>
+                                <p:cTn id="11" presetID="2" presetClass="entr" presetSubtype="4" fill="hold" grpId="0" nodeType="clickEffect">
+                                  <p:stCondLst>
+                                    <p:cond delay="0"/>
+                                  </p:stCondLst>
+                                  <p:childTnLst>
+                                    <p:set>
+                                      <p:cBhvr>
+                                        <p:cTn id="12" dur="1" fill="hold">
+                                          <p:stCondLst>
+                                            <p:cond delay="0"/>
+                                          </p:stCondLst>
+                                        </p:cTn>
+                                        <p:tgtEl>
+                                          <p:spTgt spid="6"/>
+                                        </p:tgtEl>
+                                        <p:attrNameLst>
+                                          <p:attrName>style.visibility</p:attrName>
+                                        </p:attrNameLst>
+                                      </p:cBhvr>
+                                      <p:to>
+                                        <p:strVal val="visible"/>
+                                      </p:to>
+                                    </p:set>
+                                    <p:anim calcmode="lin" valueType="num">
+                                      <p:cBhvr additive="base">
+                                        <p:cTn id="13" dur="500" fill="hold"/>
+                                        <p:tgtEl>
+                                          <p:spTgt spid="6"/>
+                                        </p:tgtEl>
+                                        <p:attrNameLst>
+                                          <p:attrName>ppt_x</p:attrName>
+                                        </p:attrNameLst>
+                                      </p:cBhvr>
+                                      <p:tavLst>
+                                        <p:tav tm="0">
+                                          <p:val>
+                                            <p:strVal val="#ppt_x"/>
+                                          </p:val>
+                                        </p:tav>
+                                        <p:tav tm="100000">
+                                          <p:val>
+                                            <p:strVal val="#ppt_x"/>
+                                          </p:val>
+                                        </p:tav>
+                                      </p:tavLst>
+                                    </p:anim>
+                                    <p:anim calcmode="lin" valueType="num">
+                                      <p:cBhvr additive="base">
+                                        <p:cTn id="14" dur="500" fill="hold"/>
+                                        <p:tgtEl>
+                                          <p:spTgt spid="6"/>
+                                        </p:tgtEl>
+                                        <p:attrNameLst>
+                                          <p:attrName>ppt_y</p:attrName>
+                                        </p:attrNameLst>
+                                      </p:cBhvr>
+                                      <p:tavLst>
+                                        <p:tav tm="0">
+                                          <p:val>
+                                            <p:strVal val="1+#ppt_h/2"/>
+                                          </p:val>
+                                        </p:tav>
+                                        <p:tav tm="100000">
+                                          <p:val>
+                                            <p:strVal val="#ppt_y"/>
+                                          </p:val>
+                                        </p:tav>
+                                      </p:tavLst>
+                                    </p:anim>
+                                  </p:childTnLst>
+                                </p:cTn>
+                              </p:par>
+                            </p:childTnLst>
+                          </p:cTn>
+                        </p:par>
+                      </p:childTnLst>
+                    </p:cTn>
+                  </p:par>
+                  <p:par>
+                    <p:cTn id="15" fill="hold">
+                      <p:stCondLst>
+                        <p:cond delay="indefinite"/>
+                      </p:stCondLst>
+                      <p:childTnLst>
+                        <p:par>
+                          <p:cTn id="16" fill="hold">
+                            <p:stCondLst>
+                              <p:cond delay="0"/>
+                            </p:stCondLst>
+                            <p:childTnLst>
+                              <p:par>
+                                <p:cTn id="17" presetID="2" presetClass="entr" presetSubtype="4" fill="hold" grpId="0" nodeType="clickEffect">
+                                  <p:stCondLst>
+                                    <p:cond delay="0"/>
+                                  </p:stCondLst>
+                                  <p:childTnLst>
+                                    <p:set>
+                                      <p:cBhvr>
+                                        <p:cTn id="18" dur="1" fill="hold">
+                                          <p:stCondLst>
+                                            <p:cond delay="0"/>
+                                          </p:stCondLst>
+                                        </p:cTn>
+                                        <p:tgtEl>
+                                          <p:spTgt spid="5"/>
+                                        </p:tgtEl>
+                                        <p:attrNameLst>
+                                          <p:attrName>style.visibility</p:attrName>
+                                        </p:attrNameLst>
+                                      </p:cBhvr>
+                                      <p:to>
+                                        <p:strVal val="visible"/>
+                                      </p:to>
+                                    </p:set>
+                                    <p:anim calcmode="lin" valueType="num">
+                                      <p:cBhvr additive="base">
+                                        <p:cTn id="19" dur="500" fill="hold"/>
+                                        <p:tgtEl>
+                                          <p:spTgt spid="5"/>
+                                        </p:tgtEl>
+                                        <p:attrNameLst>
+                                          <p:attrName>ppt_x</p:attrName>
+                                        </p:attrNameLst>
+                                      </p:cBhvr>
+                                      <p:tavLst>
+                                        <p:tav tm="0">
+                                          <p:val>
+                                            <p:strVal val="#ppt_x"/>
+                                          </p:val>
+                                        </p:tav>
+                                        <p:tav tm="100000">
+                                          <p:val>
+                                            <p:strVal val="#ppt_x"/>
+                                          </p:val>
+                                        </p:tav>
+                                      </p:tavLst>
+                                    </p:anim>
+                                    <p:anim calcmode="lin" valueType="num">
+                                      <p:cBhvr additive="base">
+                                        <p:cTn id="20" dur="500" fill="hold"/>
+                                        <p:tgtEl>
+                                          <p:spTgt spid="5"/>
+                                        </p:tgtEl>
+                                        <p:attrNameLst>
+                                          <p:attrName>ppt_y</p:attrName>
+                                        </p:attrNameLst>
+                                      </p:cBhvr>
+                                      <p:tavLst>
+                                        <p:tav tm="0">
+                                          <p:val>
+                                            <p:strVal val="1+#ppt_h/2"/>
+                                          </p:val>
+                                        </p:tav>
+                                        <p:tav tm="100000">
+                                          <p:val>
+                                            <p:strVal val="#ppt_y"/>
+                                          </p:val>
+                                        </p:tav>
+                                      </p:tavLst>
+                                    </p:anim>
+                                  </p:childTnLst>
+                                </p:cTn>
+                              </p:par>
+                            </p:childTnLst>
+                          </p:cTn>
+                        </p:par>
+                      </p:childTnLst>
+                    </p:cTn>
+                  </p:par>
+                </p:childTnLst>
+              </p:cTn>
+              <p:prevCondLst>
+                <p:cond evt="onPrev" delay="0">
+                  <p:tgtEl>
+                    <p:sldTgt/>
+                  </p:tgtEl>
+                </p:cond>
+              </p:prevCondLst>
+              <p:nextCondLst>
+                <p:cond evt="onNext" delay="0">
+                  <p:tgtEl>
+                    <p:sldTgt/>
+                  </p:tgtEl>
+                </p:cond>
+              </p:nextCondLst>
+            </p:seq>
+          </p:childTnLst>
+        </p:cTn>
+      </p:par>
+    </p:tnLst>
+    <p:bldLst>
+      <p:bldP spid="3" grpId="0" animBg="1"/>
+      <p:bldP spid="5" grpId="0" animBg="1"/>
+      <p:bldP spid="6" grpId="0"/>
+    </p:bldLst>
+  </p:timing>
+</p:sld>
+</file>
+
+<file path=ppt/slides/slide33.xml><?xml version="1.0" encoding="utf-8"?>
 <p:sld xmlns:a="http://schemas.openxmlformats.org/drawingml/2006/main" xmlns:r="http://schemas.openxmlformats.org/officeDocument/2006/relationships" xmlns:p="http://schemas.openxmlformats.org/presentationml/2006/main">
   <p:cSld>
     <p:spTree>
@@ -28437,7 +29700,7 @@
                 </a:spcAft>
                 <a:defRPr/>
               </a:pPr>
-              <a:t>30</a:t>
+              <a:t>32</a:t>
             </a:fld>
             <a:endParaRPr lang="en-US" sz="1050"/>
           </a:p>

--- a/topic12-monads/unit-12a-lectures/talk-1/a-monads.pptx
+++ b/topic12-monads/unit-12a-lectures/talk-1/a-monads.pptx
@@ -963,6 +963,96 @@
 </p:notesMaster>
 </file>
 
+<file path=ppt/notesSlides/notesSlide1.xml><?xml version="1.0" encoding="utf-8"?>
+<p:notes xmlns:a="http://schemas.openxmlformats.org/drawingml/2006/main" xmlns:r="http://schemas.openxmlformats.org/officeDocument/2006/relationships" xmlns:p="http://schemas.openxmlformats.org/presentationml/2006/main">
+  <p:cSld>
+    <p:spTree>
+      <p:nvGrpSpPr>
+        <p:cNvPr id="1" name=""/>
+        <p:cNvGrpSpPr/>
+        <p:nvPr/>
+      </p:nvGrpSpPr>
+      <p:grpSpPr>
+        <a:xfrm>
+          <a:off x="0" y="0"/>
+          <a:ext cx="0" cy="0"/>
+          <a:chOff x="0" y="0"/>
+          <a:chExt cx="0" cy="0"/>
+        </a:xfrm>
+      </p:grpSpPr>
+      <p:sp>
+        <p:nvSpPr>
+          <p:cNvPr id="2" name="Slide Image Placeholder 1"/>
+          <p:cNvSpPr>
+            <a:spLocks noGrp="1" noRot="1" noChangeAspect="1"/>
+          </p:cNvSpPr>
+          <p:nvPr>
+            <p:ph type="sldImg"/>
+          </p:nvPr>
+        </p:nvSpPr>
+        <p:spPr/>
+      </p:sp>
+      <p:sp>
+        <p:nvSpPr>
+          <p:cNvPr id="3" name="Notes Placeholder 2"/>
+          <p:cNvSpPr>
+            <a:spLocks noGrp="1"/>
+          </p:cNvSpPr>
+          <p:nvPr>
+            <p:ph type="body" idx="1"/>
+          </p:nvPr>
+        </p:nvSpPr>
+        <p:spPr/>
+        <p:txBody>
+          <a:bodyPr/>
+          <a:lstStyle/>
+          <a:p>
+            <a:endParaRPr lang="en-US" dirty="0"/>
+          </a:p>
+        </p:txBody>
+      </p:sp>
+      <p:sp>
+        <p:nvSpPr>
+          <p:cNvPr id="4" name="Slide Number Placeholder 3"/>
+          <p:cNvSpPr>
+            <a:spLocks noGrp="1"/>
+          </p:cNvSpPr>
+          <p:nvPr>
+            <p:ph type="sldNum" sz="quarter" idx="5"/>
+          </p:nvPr>
+        </p:nvSpPr>
+        <p:spPr/>
+        <p:txBody>
+          <a:bodyPr/>
+          <a:lstStyle/>
+          <a:p>
+            <a:pPr>
+              <a:defRPr/>
+            </a:pPr>
+            <a:fld id="{6F33ACC7-9D5C-574E-8DDC-58E3330852A9}" type="slidenum">
+              <a:rPr lang="en-US" altLang="en-US" smtClean="0"/>
+              <a:pPr>
+                <a:defRPr/>
+              </a:pPr>
+              <a:t>23</a:t>
+            </a:fld>
+            <a:endParaRPr lang="en-US" altLang="en-US"/>
+          </a:p>
+        </p:txBody>
+      </p:sp>
+    </p:spTree>
+    <p:extLst>
+      <p:ext uri="{BB962C8B-B14F-4D97-AF65-F5344CB8AC3E}">
+        <p14:creationId xmlns:p14="http://schemas.microsoft.com/office/powerpoint/2010/main" val="4142288578"/>
+      </p:ext>
+    </p:extLst>
+  </p:cSld>
+  <p:clrMapOvr>
+    <a:masterClrMapping/>
+  </p:clrMapOvr>
+</p:notes>
+</file>
+
 <file path=ppt/slideLayouts/slideLayout1.xml><?xml version="1.0" encoding="utf-8"?>
 <p:sldLayout xmlns:a="http://schemas.openxmlformats.org/drawingml/2006/main" xmlns:r="http://schemas.openxmlformats.org/officeDocument/2006/relationships" xmlns:p="http://schemas.openxmlformats.org/presentationml/2006/main" type="title" preserve="1">
   <p:cSld name="Title Slide">
@@ -1257,7 +1347,7 @@
               <a:pPr>
                 <a:defRPr/>
               </a:pPr>
-              <a:t>4/2/26</a:t>
+              <a:t>4/3/26</a:t>
             </a:fld>
             <a:endParaRPr lang="en-US" dirty="0"/>
           </a:p>
@@ -1701,7 +1791,7 @@
               <a:pPr>
                 <a:defRPr/>
               </a:pPr>
-              <a:t>4/2/26</a:t>
+              <a:t>4/3/26</a:t>
             </a:fld>
             <a:endParaRPr lang="en-US" dirty="0"/>
           </a:p>
@@ -2067,7 +2157,7 @@
               <a:pPr>
                 <a:defRPr/>
               </a:pPr>
-              <a:t>4/2/26</a:t>
+              <a:t>4/3/26</a:t>
             </a:fld>
             <a:endParaRPr lang="en-US" dirty="0"/>
           </a:p>
@@ -2502,7 +2592,7 @@
               <a:pPr>
                 <a:defRPr/>
               </a:pPr>
-              <a:t>4/2/26</a:t>
+              <a:t>4/3/26</a:t>
             </a:fld>
             <a:endParaRPr lang="en-US" dirty="0"/>
           </a:p>
@@ -3100,7 +3190,7 @@
               <a:pPr>
                 <a:defRPr/>
               </a:pPr>
-              <a:t>4/2/26</a:t>
+              <a:t>4/3/26</a:t>
             </a:fld>
             <a:endParaRPr lang="en-US" dirty="0"/>
           </a:p>
@@ -3811,7 +3901,7 @@
               <a:pPr>
                 <a:defRPr/>
               </a:pPr>
-              <a:t>4/2/26</a:t>
+              <a:t>4/3/26</a:t>
             </a:fld>
             <a:endParaRPr lang="en-US" dirty="0"/>
           </a:p>
@@ -4754,7 +4844,7 @@
               <a:pPr>
                 <a:defRPr/>
               </a:pPr>
-              <a:t>4/2/26</a:t>
+              <a:t>4/3/26</a:t>
             </a:fld>
             <a:endParaRPr lang="en-US" dirty="0"/>
           </a:p>
@@ -5097,7 +5187,7 @@
               <a:pPr>
                 <a:defRPr/>
               </a:pPr>
-              <a:t>4/2/26</a:t>
+              <a:t>4/3/26</a:t>
             </a:fld>
             <a:endParaRPr lang="en-US" dirty="0"/>
           </a:p>
@@ -5390,7 +5480,7 @@
               <a:pPr>
                 <a:defRPr/>
               </a:pPr>
-              <a:t>4/2/26</a:t>
+              <a:t>4/3/26</a:t>
             </a:fld>
             <a:endParaRPr lang="en-US" dirty="0"/>
           </a:p>
@@ -5742,7 +5832,7 @@
               <a:pPr>
                 <a:defRPr/>
               </a:pPr>
-              <a:t>4/2/26</a:t>
+              <a:t>4/3/26</a:t>
             </a:fld>
             <a:endParaRPr lang="en-US" dirty="0"/>
           </a:p>
@@ -6160,7 +6250,7 @@
               <a:pPr>
                 <a:defRPr/>
               </a:pPr>
-              <a:t>4/2/26</a:t>
+              <a:t>4/3/26</a:t>
             </a:fld>
             <a:endParaRPr lang="en-US" dirty="0"/>
           </a:p>
@@ -6565,7 +6655,7 @@
               <a:pPr>
                 <a:defRPr/>
               </a:pPr>
-              <a:t>4/2/26</a:t>
+              <a:t>4/3/26</a:t>
             </a:fld>
             <a:endParaRPr lang="en-US" dirty="0"/>
           </a:p>
@@ -7100,7 +7190,7 @@
               <a:pPr>
                 <a:defRPr/>
               </a:pPr>
-              <a:t>4/2/26</a:t>
+              <a:t>4/3/26</a:t>
             </a:fld>
             <a:endParaRPr lang="en-US" dirty="0"/>
           </a:p>
@@ -7386,7 +7476,7 @@
               <a:pPr>
                 <a:defRPr/>
               </a:pPr>
-              <a:t>4/2/26</a:t>
+              <a:t>4/3/26</a:t>
             </a:fld>
             <a:endParaRPr lang="en-US" dirty="0"/>
           </a:p>
@@ -7571,7 +7661,7 @@
               <a:pPr>
                 <a:defRPr/>
               </a:pPr>
-              <a:t>4/2/26</a:t>
+              <a:t>4/3/26</a:t>
             </a:fld>
             <a:endParaRPr lang="en-US" dirty="0"/>
           </a:p>
@@ -7990,7 +8080,7 @@
               <a:pPr>
                 <a:defRPr/>
               </a:pPr>
-              <a:t>4/2/26</a:t>
+              <a:t>4/3/26</a:t>
             </a:fld>
             <a:endParaRPr lang="en-US" dirty="0"/>
           </a:p>
@@ -8428,7 +8518,7 @@
               <a:pPr>
                 <a:defRPr/>
               </a:pPr>
-              <a:t>4/2/26</a:t>
+              <a:t>4/3/26</a:t>
             </a:fld>
             <a:endParaRPr lang="en-US" dirty="0"/>
           </a:p>
@@ -8687,7 +8777,7 @@
               <a:pPr>
                 <a:defRPr/>
               </a:pPr>
-              <a:t>4/2/26</a:t>
+              <a:t>4/3/26</a:t>
             </a:fld>
             <a:endParaRPr lang="en-US" dirty="0"/>
           </a:p>
@@ -15439,7 +15529,7 @@
               <a:rPr lang="en-US" sz="2400" dirty="0">
                 <a:latin typeface="Lucida Sans Typewriter" charset="0"/>
               </a:rPr>
-              <a:t>	(Just f ) &lt;*&gt; something. = fmap f something</a:t>
+              <a:t>	(Just f ) &lt;*&gt; something = fmap f something</a:t>
             </a:r>
           </a:p>
         </p:txBody>
@@ -15716,7 +15806,7 @@
               <a:rPr lang="en-US" sz="2400" dirty="0">
                 <a:latin typeface="Lucida Sans Typewriter" charset="0"/>
               </a:rPr>
-              <a:t>Just 2</a:t>
+              <a:t>Just 3</a:t>
             </a:r>
             <a:endParaRPr lang="en-US" sz="2400" dirty="0">
               <a:latin typeface="Lucida Sans Typewriter" charset="0"/>
@@ -16758,7 +16848,7 @@
               <a:rPr lang="en-US" sz="2400" dirty="0">
                 <a:latin typeface="Lucida Sans Typewriter" charset="0"/>
               </a:rPr>
-              <a:t>	(Just f ) &lt;*&gt; something. = fmap f something</a:t>
+              <a:t>	(Just f ) &lt;*&gt; something = fmap f something</a:t>
             </a:r>
           </a:p>
         </p:txBody>
@@ -17121,7 +17211,7 @@
               <a:rPr lang="en-US" sz="2400" dirty="0">
                 <a:latin typeface="Lucida Sans Typewriter" charset="0"/>
               </a:rPr>
-              <a:t>	Just f  &gt;&gt;= f = f x</a:t>
+              <a:t>	Just f  &gt;&gt;= f = Just (f x)</a:t>
             </a:r>
           </a:p>
         </p:txBody>
@@ -20542,7 +20632,19 @@
               <a:rPr lang="en-US" sz="2400" dirty="0">
                 <a:latin typeface="Lucida Sans Typewriter" charset="0"/>
               </a:rPr>
-              <a:t>(m &gt;&gt;= f) &gt;&gt;= g 	= m &gt;&gt;= (\x -&gt; x &gt;&gt;= g) -- associativity </a:t>
+              <a:t>(m &gt;&gt;= f) &gt;&gt;= g 	= m &gt;&gt;= (\x </a:t>
+            </a:r>
+            <a:r>
+              <a:rPr lang="en-US" sz="2400">
+                <a:latin typeface="Lucida Sans Typewriter" charset="0"/>
+              </a:rPr>
+              <a:t>-&gt; f x </a:t>
+            </a:r>
+            <a:r>
+              <a:rPr lang="en-US" sz="2400" dirty="0">
+                <a:latin typeface="Lucida Sans Typewriter" charset="0"/>
+              </a:rPr>
+              <a:t>&gt;&gt;= g) -- associativity </a:t>
             </a:r>
           </a:p>
         </p:txBody>
@@ -26018,7 +26120,7 @@
                 <a:latin typeface="Lucida Sans Typewriter" charset="0"/>
                 <a:cs typeface="+mn-cs"/>
               </a:rPr>
-              <a:t>  ( &lt;*&gt; ) :: f (a-&gt; b) -&gt; fa -&gt; fb</a:t>
+              <a:t>  ( &lt;*&gt; ) :: f (a-&gt; b) -&gt; f a -&gt; f b</a:t>
             </a:r>
           </a:p>
         </p:txBody>
@@ -30893,31 +30995,6 @@
           <a:chExt cx="0" cy="0"/>
         </a:xfrm>
       </p:grpSpPr>
-      <p:sp>
-        <p:nvSpPr>
-          <p:cNvPr id="2" name="Title 1">
-            <a:extLst>
-              <a:ext uri="{FF2B5EF4-FFF2-40B4-BE49-F238E27FC236}">
-                <a16:creationId xmlns:a16="http://schemas.microsoft.com/office/drawing/2014/main" id="{BF7E7ECF-C165-EBF2-F149-4BF257B4DB71}"/>
-              </a:ext>
-            </a:extLst>
-          </p:cNvPr>
-          <p:cNvSpPr>
-            <a:spLocks noGrp="1"/>
-          </p:cNvSpPr>
-          <p:nvPr>
-            <p:ph type="title"/>
-          </p:nvPr>
-        </p:nvSpPr>
-        <p:spPr/>
-        <p:txBody>
-          <a:bodyPr/>
-          <a:lstStyle/>
-          <a:p>
-            <a:endParaRPr lang="en-US" dirty="0"/>
-          </a:p>
-        </p:txBody>
-      </p:sp>
       <p:sp>
         <p:nvSpPr>
           <p:cNvPr id="4" name="Slide Number Placeholder 3">

--- a/topic12-monads/unit-12a-lectures/talk-1/a-monads.pptx
+++ b/topic12-monads/unit-12a-lectures/talk-1/a-monads.pptx
@@ -1347,7 +1347,7 @@
               <a:pPr>
                 <a:defRPr/>
               </a:pPr>
-              <a:t>4/3/26</a:t>
+              <a:t>4/13/26</a:t>
             </a:fld>
             <a:endParaRPr lang="en-US" dirty="0"/>
           </a:p>
@@ -1791,7 +1791,7 @@
               <a:pPr>
                 <a:defRPr/>
               </a:pPr>
-              <a:t>4/3/26</a:t>
+              <a:t>4/13/26</a:t>
             </a:fld>
             <a:endParaRPr lang="en-US" dirty="0"/>
           </a:p>
@@ -2157,7 +2157,7 @@
               <a:pPr>
                 <a:defRPr/>
               </a:pPr>
-              <a:t>4/3/26</a:t>
+              <a:t>4/13/26</a:t>
             </a:fld>
             <a:endParaRPr lang="en-US" dirty="0"/>
           </a:p>
@@ -2592,7 +2592,7 @@
               <a:pPr>
                 <a:defRPr/>
               </a:pPr>
-              <a:t>4/3/26</a:t>
+              <a:t>4/13/26</a:t>
             </a:fld>
             <a:endParaRPr lang="en-US" dirty="0"/>
           </a:p>
@@ -3190,7 +3190,7 @@
               <a:pPr>
                 <a:defRPr/>
               </a:pPr>
-              <a:t>4/3/26</a:t>
+              <a:t>4/13/26</a:t>
             </a:fld>
             <a:endParaRPr lang="en-US" dirty="0"/>
           </a:p>
@@ -3901,7 +3901,7 @@
               <a:pPr>
                 <a:defRPr/>
               </a:pPr>
-              <a:t>4/3/26</a:t>
+              <a:t>4/13/26</a:t>
             </a:fld>
             <a:endParaRPr lang="en-US" dirty="0"/>
           </a:p>
@@ -4844,7 +4844,7 @@
               <a:pPr>
                 <a:defRPr/>
               </a:pPr>
-              <a:t>4/3/26</a:t>
+              <a:t>4/13/26</a:t>
             </a:fld>
             <a:endParaRPr lang="en-US" dirty="0"/>
           </a:p>
@@ -5187,7 +5187,7 @@
               <a:pPr>
                 <a:defRPr/>
               </a:pPr>
-              <a:t>4/3/26</a:t>
+              <a:t>4/13/26</a:t>
             </a:fld>
             <a:endParaRPr lang="en-US" dirty="0"/>
           </a:p>
@@ -5480,7 +5480,7 @@
               <a:pPr>
                 <a:defRPr/>
               </a:pPr>
-              <a:t>4/3/26</a:t>
+              <a:t>4/13/26</a:t>
             </a:fld>
             <a:endParaRPr lang="en-US" dirty="0"/>
           </a:p>
@@ -5832,7 +5832,7 @@
               <a:pPr>
                 <a:defRPr/>
               </a:pPr>
-              <a:t>4/3/26</a:t>
+              <a:t>4/13/26</a:t>
             </a:fld>
             <a:endParaRPr lang="en-US" dirty="0"/>
           </a:p>
@@ -6250,7 +6250,7 @@
               <a:pPr>
                 <a:defRPr/>
               </a:pPr>
-              <a:t>4/3/26</a:t>
+              <a:t>4/13/26</a:t>
             </a:fld>
             <a:endParaRPr lang="en-US" dirty="0"/>
           </a:p>
@@ -6655,7 +6655,7 @@
               <a:pPr>
                 <a:defRPr/>
               </a:pPr>
-              <a:t>4/3/26</a:t>
+              <a:t>4/13/26</a:t>
             </a:fld>
             <a:endParaRPr lang="en-US" dirty="0"/>
           </a:p>
@@ -7190,7 +7190,7 @@
               <a:pPr>
                 <a:defRPr/>
               </a:pPr>
-              <a:t>4/3/26</a:t>
+              <a:t>4/13/26</a:t>
             </a:fld>
             <a:endParaRPr lang="en-US" dirty="0"/>
           </a:p>
@@ -7476,7 +7476,7 @@
               <a:pPr>
                 <a:defRPr/>
               </a:pPr>
-              <a:t>4/3/26</a:t>
+              <a:t>4/13/26</a:t>
             </a:fld>
             <a:endParaRPr lang="en-US" dirty="0"/>
           </a:p>
@@ -7661,7 +7661,7 @@
               <a:pPr>
                 <a:defRPr/>
               </a:pPr>
-              <a:t>4/3/26</a:t>
+              <a:t>4/13/26</a:t>
             </a:fld>
             <a:endParaRPr lang="en-US" dirty="0"/>
           </a:p>
@@ -8080,7 +8080,7 @@
               <a:pPr>
                 <a:defRPr/>
               </a:pPr>
-              <a:t>4/3/26</a:t>
+              <a:t>4/13/26</a:t>
             </a:fld>
             <a:endParaRPr lang="en-US" dirty="0"/>
           </a:p>
@@ -8518,7 +8518,7 @@
               <a:pPr>
                 <a:defRPr/>
               </a:pPr>
-              <a:t>4/3/26</a:t>
+              <a:t>4/13/26</a:t>
             </a:fld>
             <a:endParaRPr lang="en-US" dirty="0"/>
           </a:p>
@@ -8777,7 +8777,7 @@
               <a:pPr>
                 <a:defRPr/>
               </a:pPr>
-              <a:t>4/3/26</a:t>
+              <a:t>4/13/26</a:t>
             </a:fld>
             <a:endParaRPr lang="en-US" dirty="0"/>
           </a:p>
@@ -14880,7 +14880,7 @@
               <a:rPr lang="en-US" sz="2400" dirty="0">
                 <a:latin typeface="Lucida Sans Typewriter" charset="0"/>
               </a:rPr>
-              <a:t>							  n &lt;- eval x</a:t>
+              <a:t>							 	n &lt;- eval x</a:t>
             </a:r>
           </a:p>
           <a:p>
@@ -14894,7 +14894,7 @@
               <a:rPr lang="en-US" sz="2400" dirty="0">
                 <a:latin typeface="Lucida Sans Typewriter" charset="0"/>
               </a:rPr>
-              <a:t>						    m &lt;- eval y</a:t>
+              <a:t>						    	m &lt;- eval y</a:t>
             </a:r>
           </a:p>
           <a:p>
@@ -14908,7 +14908,7 @@
               <a:rPr lang="en-US" sz="2400" dirty="0">
                 <a:latin typeface="Lucida Sans Typewriter" charset="0"/>
               </a:rPr>
-              <a:t>						    safeDiv n m	</a:t>
+              <a:t>						    	safeDiv n m	</a:t>
             </a:r>
           </a:p>
         </p:txBody>
@@ -15072,7 +15072,7 @@
               <a:rPr lang="en-US" sz="2400" dirty="0">
                 <a:latin typeface="Lucida Sans Typewriter" charset="0"/>
               </a:rPr>
-              <a:t>  (&gt;&gt;= ) :: m a -&gt; (a -&gt; mb) -&gt; mb</a:t>
+              <a:t>  (&gt;&gt;= ) :: m a -&gt; (a -&gt; m b) -&gt; m b</a:t>
             </a:r>
           </a:p>
           <a:p>
@@ -15086,7 +15086,7 @@
               <a:rPr lang="en-US" sz="2400" dirty="0">
                 <a:latin typeface="Lucida Sans Typewriter" charset="0"/>
               </a:rPr>
-              <a:t>  return :: a -&gt; ma</a:t>
+              <a:t>  return :: a -&gt; m a</a:t>
             </a:r>
           </a:p>
           <a:p>
@@ -17211,7 +17211,7 @@
               <a:rPr lang="en-US" sz="2400" dirty="0">
                 <a:latin typeface="Lucida Sans Typewriter" charset="0"/>
               </a:rPr>
-              <a:t>	Just f  &gt;&gt;= f = Just (f x)</a:t>
+              <a:t>	Just x  &gt;&gt;= f = Just (f x)</a:t>
             </a:r>
           </a:p>
         </p:txBody>
@@ -30487,7 +30487,7 @@
               <a:rPr lang="en-US" sz="2400" dirty="0">
                 <a:latin typeface="Lucida Sans Typewriter" charset="0"/>
               </a:rPr>
-              <a:t>data Expr = Val Int | Div Expr </a:t>
+              <a:t>data Expr = Val Int | Div Expr Expr</a:t>
             </a:r>
           </a:p>
           <a:p>

--- a/topic12-monads/unit-12a-lectures/talk-1/a-monads.pptx
+++ b/topic12-monads/unit-12a-lectures/talk-1/a-monads.pptx
@@ -1347,7 +1347,7 @@
               <a:pPr>
                 <a:defRPr/>
               </a:pPr>
-              <a:t>4/13/26</a:t>
+              <a:t>4/20/26</a:t>
             </a:fld>
             <a:endParaRPr lang="en-US" dirty="0"/>
           </a:p>
@@ -1791,7 +1791,7 @@
               <a:pPr>
                 <a:defRPr/>
               </a:pPr>
-              <a:t>4/13/26</a:t>
+              <a:t>4/20/26</a:t>
             </a:fld>
             <a:endParaRPr lang="en-US" dirty="0"/>
           </a:p>
@@ -2157,7 +2157,7 @@
               <a:pPr>
                 <a:defRPr/>
               </a:pPr>
-              <a:t>4/13/26</a:t>
+              <a:t>4/20/26</a:t>
             </a:fld>
             <a:endParaRPr lang="en-US" dirty="0"/>
           </a:p>
@@ -2592,7 +2592,7 @@
               <a:pPr>
                 <a:defRPr/>
               </a:pPr>
-              <a:t>4/13/26</a:t>
+              <a:t>4/20/26</a:t>
             </a:fld>
             <a:endParaRPr lang="en-US" dirty="0"/>
           </a:p>
@@ -3190,7 +3190,7 @@
               <a:pPr>
                 <a:defRPr/>
               </a:pPr>
-              <a:t>4/13/26</a:t>
+              <a:t>4/20/26</a:t>
             </a:fld>
             <a:endParaRPr lang="en-US" dirty="0"/>
           </a:p>
@@ -3901,7 +3901,7 @@
               <a:pPr>
                 <a:defRPr/>
               </a:pPr>
-              <a:t>4/13/26</a:t>
+              <a:t>4/20/26</a:t>
             </a:fld>
             <a:endParaRPr lang="en-US" dirty="0"/>
           </a:p>
@@ -4844,7 +4844,7 @@
               <a:pPr>
                 <a:defRPr/>
               </a:pPr>
-              <a:t>4/13/26</a:t>
+              <a:t>4/20/26</a:t>
             </a:fld>
             <a:endParaRPr lang="en-US" dirty="0"/>
           </a:p>
@@ -5187,7 +5187,7 @@
               <a:pPr>
                 <a:defRPr/>
               </a:pPr>
-              <a:t>4/13/26</a:t>
+              <a:t>4/20/26</a:t>
             </a:fld>
             <a:endParaRPr lang="en-US" dirty="0"/>
           </a:p>
@@ -5480,7 +5480,7 @@
               <a:pPr>
                 <a:defRPr/>
               </a:pPr>
-              <a:t>4/13/26</a:t>
+              <a:t>4/20/26</a:t>
             </a:fld>
             <a:endParaRPr lang="en-US" dirty="0"/>
           </a:p>
@@ -5832,7 +5832,7 @@
               <a:pPr>
                 <a:defRPr/>
               </a:pPr>
-              <a:t>4/13/26</a:t>
+              <a:t>4/20/26</a:t>
             </a:fld>
             <a:endParaRPr lang="en-US" dirty="0"/>
           </a:p>
@@ -6250,7 +6250,7 @@
               <a:pPr>
                 <a:defRPr/>
               </a:pPr>
-              <a:t>4/13/26</a:t>
+              <a:t>4/20/26</a:t>
             </a:fld>
             <a:endParaRPr lang="en-US" dirty="0"/>
           </a:p>
@@ -6655,7 +6655,7 @@
               <a:pPr>
                 <a:defRPr/>
               </a:pPr>
-              <a:t>4/13/26</a:t>
+              <a:t>4/20/26</a:t>
             </a:fld>
             <a:endParaRPr lang="en-US" dirty="0"/>
           </a:p>
@@ -7190,7 +7190,7 @@
               <a:pPr>
                 <a:defRPr/>
               </a:pPr>
-              <a:t>4/13/26</a:t>
+              <a:t>4/20/26</a:t>
             </a:fld>
             <a:endParaRPr lang="en-US" dirty="0"/>
           </a:p>
@@ -7476,7 +7476,7 @@
               <a:pPr>
                 <a:defRPr/>
               </a:pPr>
-              <a:t>4/13/26</a:t>
+              <a:t>4/20/26</a:t>
             </a:fld>
             <a:endParaRPr lang="en-US" dirty="0"/>
           </a:p>
@@ -7661,7 +7661,7 @@
               <a:pPr>
                 <a:defRPr/>
               </a:pPr>
-              <a:t>4/13/26</a:t>
+              <a:t>4/20/26</a:t>
             </a:fld>
             <a:endParaRPr lang="en-US" dirty="0"/>
           </a:p>
@@ -8080,7 +8080,7 @@
               <a:pPr>
                 <a:defRPr/>
               </a:pPr>
-              <a:t>4/13/26</a:t>
+              <a:t>4/20/26</a:t>
             </a:fld>
             <a:endParaRPr lang="en-US" dirty="0"/>
           </a:p>
@@ -8518,7 +8518,7 @@
               <a:pPr>
                 <a:defRPr/>
               </a:pPr>
-              <a:t>4/13/26</a:t>
+              <a:t>4/20/26</a:t>
             </a:fld>
             <a:endParaRPr lang="en-US" dirty="0"/>
           </a:p>
@@ -8777,7 +8777,7 @@
               <a:pPr>
                 <a:defRPr/>
               </a:pPr>
-              <a:t>4/13/26</a:t>
+              <a:t>4/20/26</a:t>
             </a:fld>
             <a:endParaRPr lang="en-US" dirty="0"/>
           </a:p>
@@ -24844,7 +24844,11 @@
             </a:r>
             <a:r>
               <a:rPr lang="en-US" sz="2400" dirty="0"/>
-              <a:t> returns True.</a:t>
+              <a:t> </a:t>
+            </a:r>
+            <a:r>
+              <a:rPr lang="en-US" sz="2400"/>
+              <a:t>returns False.</a:t>
             </a:r>
             <a:endParaRPr lang="en-US" sz="2400" dirty="0">
               <a:latin typeface="Lucida Sans Typewriter" charset="0"/>
